--- a/data/outputs/v2/Biology/SS1.2_Chemicals_of_Life/quiz/Biology_G10_SS1.2_Chemicals_of_Life_L3_QuickCheck.pptx
+++ b/data/outputs/v2/Biology/SS1.2_Chemicals_of_Life/quiz/Biology_G10_SS1.2_Chemicals_of_Life_L3_QuickCheck.pptx
@@ -1698,7 +1698,7 @@
                 <a:ea typeface="Arial" pitchFamily="34" charset="-122"/>
                 <a:cs typeface="Arial" pitchFamily="34" charset="-120"/>
               </a:rPr>
-              <a:t>Lesson 3: Observe (Part 2): Lipids and Vitamins — Structure, Function, and Food Tests</a:t>
+              <a:t>Lesson 3: Carbohydrates: Starch and Sugars</a:t>
             </a:r>
             <a:endParaRPr lang="en-US" sz="2000" dirty="0"/>
           </a:p>
@@ -2021,7 +2021,7 @@
                 <a:ea typeface="Arial" pitchFamily="34" charset="-122"/>
                 <a:cs typeface="Arial" pitchFamily="34" charset="-120"/>
               </a:rPr>
-              <a:t>A learner rubs mashed groundnuts on a piece of brown paper bag and waits 5 minutes for it to dry. Which observation shows that the groundnuts contain lipids?</a:t>
+              <a:t>A group adds 2-3 drops of iodine solution to some maize flour mixed with water. Which result shows that starch is present?</a:t>
             </a:r>
             <a:endParaRPr lang="en-US" sz="2000" dirty="0"/>
           </a:p>
@@ -2121,7 +2121,7 @@
                 <a:ea typeface="Arial" pitchFamily="34" charset="-122"/>
                 <a:cs typeface="Arial" pitchFamily="34" charset="-120"/>
               </a:rPr>
-              <a:t>A translucent (greasy) spot stays on the paper even after it is dry</a:t>
+              <a:t>The mixture turns brick-red</a:t>
             </a:r>
             <a:endParaRPr lang="en-US" sz="1700" dirty="0"/>
           </a:p>
@@ -2221,7 +2221,7 @@
                 <a:ea typeface="Arial" pitchFamily="34" charset="-122"/>
                 <a:cs typeface="Arial" pitchFamily="34" charset="-120"/>
               </a:rPr>
-              <a:t>A wet spot appears but disappears completely once the paper dries</a:t>
+              <a:t>The mixture turns blue-black</a:t>
             </a:r>
             <a:endParaRPr lang="en-US" sz="1700" dirty="0"/>
           </a:p>
@@ -2321,7 +2321,7 @@
                 <a:ea typeface="Arial" pitchFamily="34" charset="-122"/>
                 <a:cs typeface="Arial" pitchFamily="34" charset="-120"/>
               </a:rPr>
-              <a:t>The paper stays completely dry and unmarked</a:t>
+              <a:t>The mixture turns yellow-orange and stays clear</a:t>
             </a:r>
             <a:endParaRPr lang="en-US" sz="1700" dirty="0"/>
           </a:p>
@@ -2421,7 +2421,7 @@
                 <a:ea typeface="Arial" pitchFamily="34" charset="-122"/>
                 <a:cs typeface="Arial" pitchFamily="34" charset="-120"/>
               </a:rPr>
-              <a:t>The paper turns a purple colour where the food was rubbed</a:t>
+              <a:t>The mixture turns green</a:t>
             </a:r>
             <a:endParaRPr lang="en-US" sz="1700" dirty="0"/>
           </a:p>
@@ -2631,7 +2631,7 @@
                 <a:ea typeface="Arial" pitchFamily="34" charset="-122"/>
                 <a:cs typeface="Arial" pitchFamily="34" charset="-120"/>
               </a:rPr>
-              <a:t>In the ethanol emulsion test, a learner dissolves a food sample in ethanol, then pours the clear ethanol layer into a test tube of distilled water. What result shows that lipid is present?</a:t>
+              <a:t>A learner mixes 2 cm3 of mashed ripe banana solution with 2 cm3 of Benedict's solution and heats it in a hot water bath for 4 minutes. It turns orange to brick-red. What does this show?</a:t>
             </a:r>
             <a:endParaRPr lang="en-US" sz="2000" dirty="0"/>
           </a:p>
@@ -2731,7 +2731,7 @@
                 <a:ea typeface="Arial" pitchFamily="34" charset="-122"/>
                 <a:cs typeface="Arial" pitchFamily="34" charset="-120"/>
               </a:rPr>
-              <a:t>The mixture stays clear and colourless</a:t>
+              <a:t>The banana contains starch</a:t>
             </a:r>
             <a:endParaRPr lang="en-US" sz="1700" dirty="0"/>
           </a:p>
@@ -2831,7 +2831,7 @@
                 <a:ea typeface="Arial" pitchFamily="34" charset="-122"/>
                 <a:cs typeface="Arial" pitchFamily="34" charset="-120"/>
               </a:rPr>
-              <a:t>A cloudy white emulsion forms</a:t>
+              <a:t>The banana contains a lot of reducing sugar</a:t>
             </a:r>
             <a:endParaRPr lang="en-US" sz="1700" dirty="0"/>
           </a:p>
@@ -2931,7 +2931,7 @@
                 <a:ea typeface="Arial" pitchFamily="34" charset="-122"/>
                 <a:cs typeface="Arial" pitchFamily="34" charset="-120"/>
               </a:rPr>
-              <a:t>The mixture bubbles and gives off heat</a:t>
+              <a:t>The banana contains protein</a:t>
             </a:r>
             <a:endParaRPr lang="en-US" sz="1700" dirty="0"/>
           </a:p>
@@ -3031,7 +3031,7 @@
                 <a:ea typeface="Arial" pitchFamily="34" charset="-122"/>
                 <a:cs typeface="Arial" pitchFamily="34" charset="-120"/>
               </a:rPr>
-              <a:t>The mixture turns purple</a:t>
+              <a:t>The banana contains no carbohydrate</a:t>
             </a:r>
             <a:endParaRPr lang="en-US" sz="1700" dirty="0"/>
           </a:p>
@@ -3202,7 +3202,7 @@
                 <a:ea typeface="Arial" pitchFamily="34" charset="-122"/>
                 <a:cs typeface="Arial" pitchFamily="34" charset="-120"/>
               </a:rPr>
-              <a:t>Use after: Observe phase</a:t>
+              <a:t>Use after: Explain phase</a:t>
             </a:r>
             <a:endParaRPr lang="en-US" sz="1100" dirty="0"/>
           </a:p>
@@ -3241,7 +3241,7 @@
                 <a:ea typeface="Arial" pitchFamily="34" charset="-122"/>
                 <a:cs typeface="Arial" pitchFamily="34" charset="-120"/>
               </a:rPr>
-              <a:t>A group tests ugali paste (maize starch) with both the translucent spot test and the ethanol emulsion test. Which set of results would you expect?</a:t>
+              <a:t>Ugali turns blue-black with iodine solution but stays blue when heated with Benedict's solution. What does this tell us about the carbohydrate in ugali before digestion?</a:t>
             </a:r>
             <a:endParaRPr lang="en-US" sz="2000" dirty="0"/>
           </a:p>
@@ -3341,7 +3341,7 @@
                 <a:ea typeface="Arial" pitchFamily="34" charset="-122"/>
                 <a:cs typeface="Arial" pitchFamily="34" charset="-120"/>
               </a:rPr>
-              <a:t>A permanent translucent spot and a cloudy white emulsion</a:t>
+              <a:t>It contains starch but no reducing sugar such as glucose</a:t>
             </a:r>
             <a:endParaRPr lang="en-US" sz="1700" dirty="0"/>
           </a:p>
@@ -3441,7 +3441,7 @@
                 <a:ea typeface="Arial" pitchFamily="34" charset="-122"/>
                 <a:cs typeface="Arial" pitchFamily="34" charset="-120"/>
               </a:rPr>
-              <a:t>No permanent translucent spot but a cloudy white emulsion</a:t>
+              <a:t>It contains no carbohydrate</a:t>
             </a:r>
             <a:endParaRPr lang="en-US" sz="1700" dirty="0"/>
           </a:p>
@@ -3541,7 +3541,7 @@
                 <a:ea typeface="Arial" pitchFamily="34" charset="-122"/>
                 <a:cs typeface="Arial" pitchFamily="34" charset="-120"/>
               </a:rPr>
-              <a:t>No permanent translucent spot and a clear solution in water</a:t>
+              <a:t>It contains both starch and a lot of glucose</a:t>
             </a:r>
             <a:endParaRPr lang="en-US" sz="1700" dirty="0"/>
           </a:p>
@@ -3641,7 +3641,7 @@
                 <a:ea typeface="Arial" pitchFamily="34" charset="-122"/>
                 <a:cs typeface="Arial" pitchFamily="34" charset="-120"/>
               </a:rPr>
-              <a:t>A permanent translucent spot but a clear solution in water</a:t>
+              <a:t>It contains glucose but no starch</a:t>
             </a:r>
             <a:endParaRPr lang="en-US" sz="1700" dirty="0"/>
           </a:p>
@@ -3812,7 +3812,7 @@
                 <a:ea typeface="Arial" pitchFamily="34" charset="-122"/>
                 <a:cs typeface="Arial" pitchFamily="34" charset="-120"/>
               </a:rPr>
-              <a:t>Use after: Observe phase</a:t>
+              <a:t>Use after: Explain phase</a:t>
             </a:r>
             <a:endParaRPr lang="en-US" sz="1100" dirty="0"/>
           </a:p>
@@ -3851,7 +3851,7 @@
                 <a:ea typeface="Arial" pitchFamily="34" charset="-122"/>
                 <a:cs typeface="Arial" pitchFamily="34" charset="-120"/>
               </a:rPr>
-              <a:t>Which row correctly matches a vitamin with its type and the deficiency disease it causes?</a:t>
+              <a:t>Ugali has no reducing sugar, yet Wanjiru's blood glucose went up after she ate it. Which statement best explains this?</a:t>
             </a:r>
             <a:endParaRPr lang="en-US" sz="2300" dirty="0"/>
           </a:p>
@@ -3943,7 +3943,7 @@
               <a:buNone/>
             </a:pPr>
             <a:r>
-              <a:rPr lang="en-US" sz="1700" dirty="0">
+              <a:rPr lang="en-US" sz="1300" dirty="0">
                 <a:solidFill>
                   <a:srgbClr val="FFFFFF"/>
                 </a:solidFill>
@@ -3951,9 +3951,9 @@
                 <a:ea typeface="Arial" pitchFamily="34" charset="-122"/>
                 <a:cs typeface="Arial" pitchFamily="34" charset="-120"/>
               </a:rPr>
-              <a:t>Vitamin C: fat-soluble; deficiency causes scurvy</a:t>
-            </a:r>
-            <a:endParaRPr lang="en-US" sz="1700" dirty="0"/>
+              <a:t>Starch is already glucose, so it passes straight into the blood</a:t>
+            </a:r>
+            <a:endParaRPr lang="en-US" sz="1300" dirty="0"/>
           </a:p>
         </p:txBody>
       </p:sp>
@@ -4043,7 +4043,7 @@
               <a:buNone/>
             </a:pPr>
             <a:r>
-              <a:rPr lang="en-US" sz="1700" dirty="0">
+              <a:rPr lang="en-US" sz="1300" dirty="0">
                 <a:solidFill>
                   <a:srgbClr val="FFFFFF"/>
                 </a:solidFill>
@@ -4051,9 +4051,9 @@
                 <a:ea typeface="Arial" pitchFamily="34" charset="-122"/>
                 <a:cs typeface="Arial" pitchFamily="34" charset="-120"/>
               </a:rPr>
-              <a:t>Vitamin A: fat-soluble; deficiency causes night blindness</a:t>
-            </a:r>
-            <a:endParaRPr lang="en-US" sz="1700" dirty="0"/>
+              <a:t>Beans turn into starch in the stomach, which raises the glucose</a:t>
+            </a:r>
+            <a:endParaRPr lang="en-US" sz="1300" dirty="0"/>
           </a:p>
         </p:txBody>
       </p:sp>
@@ -4143,7 +4143,7 @@
               <a:buNone/>
             </a:pPr>
             <a:r>
-              <a:rPr lang="en-US" sz="1700" dirty="0">
+              <a:rPr lang="en-US" sz="1300" dirty="0">
                 <a:solidFill>
                   <a:srgbClr val="FFFFFF"/>
                 </a:solidFill>
@@ -4151,9 +4151,9 @@
                 <a:ea typeface="Arial" pitchFamily="34" charset="-122"/>
                 <a:cs typeface="Arial" pitchFamily="34" charset="-120"/>
               </a:rPr>
-              <a:t>B-complex vitamins: fat-soluble; deficiency causes beriberi</a:t>
-            </a:r>
-            <a:endParaRPr lang="en-US" sz="1700" dirty="0"/>
+              <a:t>Starch changes into protein, which then enters the blood as glucose</a:t>
+            </a:r>
+            <a:endParaRPr lang="en-US" sz="1300" dirty="0"/>
           </a:p>
         </p:txBody>
       </p:sp>
@@ -4243,7 +4243,7 @@
               <a:buNone/>
             </a:pPr>
             <a:r>
-              <a:rPr lang="en-US" sz="1700" dirty="0">
+              <a:rPr lang="en-US" sz="1300" dirty="0">
                 <a:solidFill>
                   <a:srgbClr val="FFFFFF"/>
                 </a:solidFill>
@@ -4251,9 +4251,9 @@
                 <a:ea typeface="Arial" pitchFamily="34" charset="-122"/>
                 <a:cs typeface="Arial" pitchFamily="34" charset="-120"/>
               </a:rPr>
-              <a:t>Vitamin D: water-soluble; deficiency causes rickets</a:t>
-            </a:r>
-            <a:endParaRPr lang="en-US" sz="1700" dirty="0"/>
+              <a:t>Starch is made of many glucose units joined together, so it must be broken down into glucose before entering the blood</a:t>
+            </a:r>
+            <a:endParaRPr lang="en-US" sz="1300" dirty="0"/>
           </a:p>
         </p:txBody>
       </p:sp>
@@ -4461,7 +4461,7 @@
                 <a:ea typeface="Arial" pitchFamily="34" charset="-122"/>
                 <a:cs typeface="Arial" pitchFamily="34" charset="-120"/>
               </a:rPr>
-              <a:t>A child eats a meal rich in vitamin A but has almost no fat in their diet. Why might the child still develop night blindness?</a:t>
+              <a:t>Wanjiru's blood glucose concentration was 4.5 mmol/L before lunch and reached a peak of 8.0 mmol/L after 60 minutes. By how much did it rise, in mmol/L?</a:t>
             </a:r>
             <a:endParaRPr lang="en-US" sz="2000" dirty="0"/>
           </a:p>
@@ -4561,7 +4561,7 @@
                 <a:ea typeface="Arial" pitchFamily="34" charset="-122"/>
                 <a:cs typeface="Arial" pitchFamily="34" charset="-120"/>
               </a:rPr>
-              <a:t>Vitamin A is fat-soluble and needs dietary fat to be absorbed</a:t>
+              <a:t>3.0</a:t>
             </a:r>
             <a:endParaRPr lang="en-US" sz="1700" dirty="0"/>
           </a:p>
@@ -4661,7 +4661,7 @@
                 <a:ea typeface="Arial" pitchFamily="34" charset="-122"/>
                 <a:cs typeface="Arial" pitchFamily="34" charset="-120"/>
               </a:rPr>
-              <a:t>Vitamin A is a protein, so it cannot be used without amino acids</a:t>
+              <a:t>3.5</a:t>
             </a:r>
             <a:endParaRPr lang="en-US" sz="1700" dirty="0"/>
           </a:p>
@@ -4761,7 +4761,7 @@
                 <a:ea typeface="Arial" pitchFamily="34" charset="-122"/>
                 <a:cs typeface="Arial" pitchFamily="34" charset="-120"/>
               </a:rPr>
-              <a:t>Fat destroys vitamin A in the stomach</a:t>
+              <a:t>12.5</a:t>
             </a:r>
             <a:endParaRPr lang="en-US" sz="1700" dirty="0"/>
           </a:p>
@@ -4861,7 +4861,7 @@
                 <a:ea typeface="Arial" pitchFamily="34" charset="-122"/>
                 <a:cs typeface="Arial" pitchFamily="34" charset="-120"/>
               </a:rPr>
-              <a:t>Vitamin A is water-soluble and is washed out of the body too quickly</a:t>
+              <a:t>4.5</a:t>
             </a:r>
             <a:endParaRPr lang="en-US" sz="1700" dirty="0"/>
           </a:p>
@@ -5032,7 +5032,7 @@
                 <a:ea typeface="Arial" pitchFamily="34" charset="-122"/>
                 <a:cs typeface="Arial" pitchFamily="34" charset="-120"/>
               </a:rPr>
-              <a:t>Use after: Model Building phase</a:t>
+              <a:t>Use after: DQB phase</a:t>
             </a:r>
             <a:endParaRPr lang="en-US" sz="1100" dirty="0"/>
           </a:p>
@@ -5063,7 +5063,7 @@
               <a:buNone/>
             </a:pPr>
             <a:r>
-              <a:rPr lang="en-US" sz="2300" b="1" dirty="0">
+              <a:rPr lang="en-US" sz="2000" b="1" dirty="0">
                 <a:solidFill>
                   <a:srgbClr val="FFFFFF"/>
                 </a:solidFill>
@@ -5071,9 +5071,9 @@
                 <a:ea typeface="Arial" pitchFamily="34" charset="-122"/>
                 <a:cs typeface="Arial" pitchFamily="34" charset="-120"/>
               </a:rPr>
-              <a:t>At the chemical level, what is a lipid (fat) made of?</a:t>
-            </a:r>
-            <a:endParaRPr lang="en-US" sz="2300" dirty="0"/>
+              <a:t>After today's food tests, the class DQB has these four questions. Which one can the class now answer using the test results?</a:t>
+            </a:r>
+            <a:endParaRPr lang="en-US" sz="2000" dirty="0"/>
           </a:p>
         </p:txBody>
       </p:sp>
@@ -5171,7 +5171,7 @@
                 <a:ea typeface="Arial" pitchFamily="34" charset="-122"/>
                 <a:cs typeface="Arial" pitchFamily="34" charset="-120"/>
               </a:rPr>
-              <a:t>Vitamins joined to a mineral salt</a:t>
+              <a:t>Does the body use only carbohydrates for energy?</a:t>
             </a:r>
             <a:endParaRPr lang="en-US" sz="1700" dirty="0"/>
           </a:p>
@@ -5271,7 +5271,7 @@
                 <a:ea typeface="Arial" pitchFamily="34" charset="-122"/>
                 <a:cs typeface="Arial" pitchFamily="34" charset="-120"/>
               </a:rPr>
-              <a:t>A glycerol backbone joined to fatty acid chains</a:t>
+              <a:t>Why did Wanjiru's blood glucose fall after 60 minutes?</a:t>
             </a:r>
             <a:endParaRPr lang="en-US" sz="1700" dirty="0"/>
           </a:p>
@@ -5371,7 +5371,7 @@
                 <a:ea typeface="Arial" pitchFamily="34" charset="-122"/>
                 <a:cs typeface="Arial" pitchFamily="34" charset="-120"/>
               </a:rPr>
-              <a:t>Long chains of amino acids joined together</a:t>
+              <a:t>Which enzyme breaks starch into glucose?</a:t>
             </a:r>
             <a:endParaRPr lang="en-US" sz="1700" dirty="0"/>
           </a:p>
@@ -5471,7 +5471,7 @@
                 <a:ea typeface="Arial" pitchFamily="34" charset="-122"/>
                 <a:cs typeface="Arial" pitchFamily="34" charset="-120"/>
               </a:rPr>
-              <a:t>Many glucose units joined in a long chain</a:t>
+              <a:t>Do ugali and maize flour contain starch?</a:t>
             </a:r>
             <a:endParaRPr lang="en-US" sz="1700" dirty="0"/>
           </a:p>
@@ -5642,7 +5642,7 @@
                 <a:ea typeface="Arial" pitchFamily="34" charset="-122"/>
                 <a:cs typeface="Arial" pitchFamily="34" charset="-120"/>
               </a:rPr>
-              <a:t>Use after: End of lesson</a:t>
+              <a:t>Use after: Model Building phase</a:t>
             </a:r>
             <a:endParaRPr lang="en-US" sz="1100" dirty="0"/>
           </a:p>
@@ -5673,7 +5673,7 @@
               <a:buNone/>
             </a:pPr>
             <a:r>
-              <a:rPr lang="en-US" sz="2300" b="1" dirty="0">
+              <a:rPr lang="en-US" sz="2000" b="1" dirty="0">
                 <a:solidFill>
                   <a:srgbClr val="FFFFFF"/>
                 </a:solidFill>
@@ -5681,9 +5681,9 @@
                 <a:ea typeface="Arial" pitchFamily="34" charset="-122"/>
                 <a:cs typeface="Arial" pitchFamily="34" charset="-120"/>
               </a:rPr>
-              <a:t>Which statement correctly describes the roles of lipids in living organisms?</a:t>
-            </a:r>
-            <a:endParaRPr lang="en-US" sz="2300" dirty="0"/>
+              <a:t>Which statement about the chain from ugali to blood glucose is supported by today's evidence and should be added to the 'food chemicals' box of the class model?</a:t>
+            </a:r>
+            <a:endParaRPr lang="en-US" sz="2000" dirty="0"/>
           </a:p>
         </p:txBody>
       </p:sp>
@@ -5773,7 +5773,7 @@
               <a:buNone/>
             </a:pPr>
             <a:r>
-              <a:rPr lang="en-US" sz="1700" dirty="0">
+              <a:rPr lang="en-US" sz="1500" dirty="0">
                 <a:solidFill>
                   <a:srgbClr val="FFFFFF"/>
                 </a:solidFill>
@@ -5781,9 +5781,9 @@
                 <a:ea typeface="Arial" pitchFamily="34" charset="-122"/>
                 <a:cs typeface="Arial" pitchFamily="34" charset="-120"/>
               </a:rPr>
-              <a:t>Lipids are harmful chemicals that the body does not need</a:t>
-            </a:r>
-            <a:endParaRPr lang="en-US" sz="1700" dirty="0"/>
+              <a:t>Ugali contains starch, which is made of glucose units, so it can be a source of the glucose in the blood</a:t>
+            </a:r>
+            <a:endParaRPr lang="en-US" sz="1500" dirty="0"/>
           </a:p>
         </p:txBody>
       </p:sp>
@@ -5873,7 +5873,7 @@
               <a:buNone/>
             </a:pPr>
             <a:r>
-              <a:rPr lang="en-US" sz="1700" dirty="0">
+              <a:rPr lang="en-US" sz="1500" dirty="0">
                 <a:solidFill>
                   <a:srgbClr val="FFFFFF"/>
                 </a:solidFill>
@@ -5881,9 +5881,9 @@
                 <a:ea typeface="Arial" pitchFamily="34" charset="-122"/>
                 <a:cs typeface="Arial" pitchFamily="34" charset="-120"/>
               </a:rPr>
-              <a:t>Lipids only provide vitamins and have no other role</a:t>
-            </a:r>
-            <a:endParaRPr lang="en-US" sz="1700" dirty="0"/>
+              <a:t>Nyama choma gives a blue-black result with iodine, so it is the main source of starch in Wanjiru's lunch</a:t>
+            </a:r>
+            <a:endParaRPr lang="en-US" sz="1500" dirty="0"/>
           </a:p>
         </p:txBody>
       </p:sp>
@@ -5973,7 +5973,7 @@
               <a:buNone/>
             </a:pPr>
             <a:r>
-              <a:rPr lang="en-US" sz="1700" dirty="0">
+              <a:rPr lang="en-US" sz="1500" dirty="0">
                 <a:solidFill>
                   <a:srgbClr val="FFFFFF"/>
                 </a:solidFill>
@@ -5981,9 +5981,9 @@
                 <a:ea typeface="Arial" pitchFamily="34" charset="-122"/>
                 <a:cs typeface="Arial" pitchFamily="34" charset="-120"/>
               </a:rPr>
-              <a:t>Lipids store energy and are part of cell membranes</a:t>
-            </a:r>
-            <a:endParaRPr lang="en-US" sz="1700" dirty="0"/>
+              <a:t>Ugali gives a brick-red result with Benedict's solution, so it already contains glucose</a:t>
+            </a:r>
+            <a:endParaRPr lang="en-US" sz="1500" dirty="0"/>
           </a:p>
         </p:txBody>
       </p:sp>
@@ -6073,7 +6073,7 @@
               <a:buNone/>
             </a:pPr>
             <a:r>
-              <a:rPr lang="en-US" sz="1700" dirty="0">
+              <a:rPr lang="en-US" sz="1500" dirty="0">
                 <a:solidFill>
                   <a:srgbClr val="FFFFFF"/>
                 </a:solidFill>
@@ -6081,9 +6081,9 @@
                 <a:ea typeface="Arial" pitchFamily="34" charset="-122"/>
                 <a:cs typeface="Arial" pitchFamily="34" charset="-120"/>
               </a:rPr>
-              <a:t>Lipids are the main chemicals used to build muscles and repair tissues</a:t>
-            </a:r>
-            <a:endParaRPr lang="en-US" sz="1700" dirty="0"/>
+              <a:t>Only sweet foods contain carbohydrates, so ugali cannot be a source of glucose</a:t>
+            </a:r>
+            <a:endParaRPr lang="en-US" sz="1500" dirty="0"/>
           </a:p>
         </p:txBody>
       </p:sp>
